--- a/.lessons/21 Fundamental CRUD/14 Deleting a Record Permanently/1.pptx
+++ b/.lessons/21 Fundamental CRUD/14 Deleting a Record Permanently/1.pptx
@@ -262,7 +262,7 @@
           <a:p>
             <a:fld id="{3E102D2E-813C-461C-9963-687A650C48C0}" type="datetimeFigureOut">
               <a:rPr lang="en-US" smtClean="0"/>
-              <a:t>4/26/2025</a:t>
+              <a:t>5/21/2025</a:t>
             </a:fld>
             <a:endParaRPr lang="en-US"/>
           </a:p>
@@ -460,7 +460,7 @@
           <a:p>
             <a:fld id="{3E102D2E-813C-461C-9963-687A650C48C0}" type="datetimeFigureOut">
               <a:rPr lang="en-US" smtClean="0"/>
-              <a:t>4/26/2025</a:t>
+              <a:t>5/21/2025</a:t>
             </a:fld>
             <a:endParaRPr lang="en-US"/>
           </a:p>
@@ -668,7 +668,7 @@
           <a:p>
             <a:fld id="{3E102D2E-813C-461C-9963-687A650C48C0}" type="datetimeFigureOut">
               <a:rPr lang="en-US" smtClean="0"/>
-              <a:t>4/26/2025</a:t>
+              <a:t>5/21/2025</a:t>
             </a:fld>
             <a:endParaRPr lang="en-US"/>
           </a:p>
@@ -866,7 +866,7 @@
           <a:p>
             <a:fld id="{3E102D2E-813C-461C-9963-687A650C48C0}" type="datetimeFigureOut">
               <a:rPr lang="en-US" smtClean="0"/>
-              <a:t>4/26/2025</a:t>
+              <a:t>5/21/2025</a:t>
             </a:fld>
             <a:endParaRPr lang="en-US"/>
           </a:p>
@@ -1141,7 +1141,7 @@
           <a:p>
             <a:fld id="{3E102D2E-813C-461C-9963-687A650C48C0}" type="datetimeFigureOut">
               <a:rPr lang="en-US" smtClean="0"/>
-              <a:t>4/26/2025</a:t>
+              <a:t>5/21/2025</a:t>
             </a:fld>
             <a:endParaRPr lang="en-US"/>
           </a:p>
@@ -1406,7 +1406,7 @@
           <a:p>
             <a:fld id="{3E102D2E-813C-461C-9963-687A650C48C0}" type="datetimeFigureOut">
               <a:rPr lang="en-US" smtClean="0"/>
-              <a:t>4/26/2025</a:t>
+              <a:t>5/21/2025</a:t>
             </a:fld>
             <a:endParaRPr lang="en-US"/>
           </a:p>
@@ -1818,7 +1818,7 @@
           <a:p>
             <a:fld id="{3E102D2E-813C-461C-9963-687A650C48C0}" type="datetimeFigureOut">
               <a:rPr lang="en-US" smtClean="0"/>
-              <a:t>4/26/2025</a:t>
+              <a:t>5/21/2025</a:t>
             </a:fld>
             <a:endParaRPr lang="en-US"/>
           </a:p>
@@ -1959,7 +1959,7 @@
           <a:p>
             <a:fld id="{3E102D2E-813C-461C-9963-687A650C48C0}" type="datetimeFigureOut">
               <a:rPr lang="en-US" smtClean="0"/>
-              <a:t>4/26/2025</a:t>
+              <a:t>5/21/2025</a:t>
             </a:fld>
             <a:endParaRPr lang="en-US"/>
           </a:p>
@@ -2072,7 +2072,7 @@
           <a:p>
             <a:fld id="{3E102D2E-813C-461C-9963-687A650C48C0}" type="datetimeFigureOut">
               <a:rPr lang="en-US" smtClean="0"/>
-              <a:t>4/26/2025</a:t>
+              <a:t>5/21/2025</a:t>
             </a:fld>
             <a:endParaRPr lang="en-US"/>
           </a:p>
@@ -2383,7 +2383,7 @@
           <a:p>
             <a:fld id="{3E102D2E-813C-461C-9963-687A650C48C0}" type="datetimeFigureOut">
               <a:rPr lang="en-US" smtClean="0"/>
-              <a:t>4/26/2025</a:t>
+              <a:t>5/21/2025</a:t>
             </a:fld>
             <a:endParaRPr lang="en-US"/>
           </a:p>
@@ -2671,7 +2671,7 @@
           <a:p>
             <a:fld id="{3E102D2E-813C-461C-9963-687A650C48C0}" type="datetimeFigureOut">
               <a:rPr lang="en-US" smtClean="0"/>
-              <a:t>4/26/2025</a:t>
+              <a:t>5/21/2025</a:t>
             </a:fld>
             <a:endParaRPr lang="en-US"/>
           </a:p>
@@ -2912,7 +2912,7 @@
           <a:p>
             <a:fld id="{3E102D2E-813C-461C-9963-687A650C48C0}" type="datetimeFigureOut">
               <a:rPr lang="en-US" smtClean="0"/>
-              <a:t>4/26/2025</a:t>
+              <a:t>5/21/2025</a:t>
             </a:fld>
             <a:endParaRPr lang="en-US"/>
           </a:p>
@@ -3370,7 +3370,7 @@
               <a:buNone/>
             </a:pPr>
             <a:r>
-              <a:rPr kumimoji="0" lang="en-US" altLang="en-US" sz="1300" b="0" i="0" u="none" strike="noStrike" cap="none" normalizeH="0" baseline="0">
+              <a:rPr kumimoji="0" lang="az-Latn-AZ" altLang="en-US" sz="1300" b="0" i="0" u="none" strike="noStrike" cap="none" normalizeH="0" baseline="0">
                 <a:ln>
                   <a:noFill/>
                 </a:ln>
@@ -3380,11 +3380,83 @@
                 <a:effectLst/>
                 <a:latin typeface="Arial" panose="020B0604020202020204" pitchFamily="34" charset="0"/>
               </a:rPr>
+              <a:t>İndi də </a:t>
+            </a:r>
+            <a:r>
+              <a:rPr kumimoji="0" lang="az-Latn-AZ" altLang="en-US" sz="1300" b="1" i="0" u="none" strike="noStrike" cap="none" normalizeH="0" baseline="0">
+                <a:ln>
+                  <a:noFill/>
+                </a:ln>
+                <a:solidFill>
+                  <a:srgbClr val="FF0000"/>
+                </a:solidFill>
+                <a:effectLst/>
+                <a:latin typeface="Arial" panose="020B0604020202020204" pitchFamily="34" charset="0"/>
+              </a:rPr>
+              <a:t>forceDelete() </a:t>
+            </a:r>
+            <a:r>
+              <a:rPr kumimoji="0" lang="az-Latn-AZ" altLang="en-US" sz="1300" b="0" i="0" u="none" strike="noStrike" cap="none" normalizeH="0" baseline="0">
+                <a:ln>
+                  <a:noFill/>
+                </a:ln>
+                <a:solidFill>
+                  <a:schemeClr val="tx1"/>
+                </a:solidFill>
+                <a:effectLst/>
+                <a:latin typeface="Arial" panose="020B0604020202020204" pitchFamily="34" charset="0"/>
+              </a:rPr>
+              <a:t>funksiyası ilə datanı tamam silirik</a:t>
+            </a:r>
+            <a:r>
+              <a:rPr lang="az-Latn-AZ" altLang="en-US" sz="1300">
+                <a:latin typeface="Arial" panose="020B0604020202020204" pitchFamily="34" charset="0"/>
+              </a:rPr>
               <a:t>.</a:t>
             </a:r>
-          </a:p>
-        </p:txBody>
-      </p:sp>
+            <a:endParaRPr kumimoji="0" lang="en-US" altLang="en-US" sz="1300" b="0" i="0" u="none" strike="noStrike" cap="none" normalizeH="0" baseline="0">
+              <a:ln>
+                <a:noFill/>
+              </a:ln>
+              <a:solidFill>
+                <a:schemeClr val="tx1"/>
+              </a:solidFill>
+              <a:effectLst/>
+              <a:latin typeface="Arial" panose="020B0604020202020204" pitchFamily="34" charset="0"/>
+            </a:endParaRPr>
+          </a:p>
+        </p:txBody>
+      </p:sp>
+      <p:pic>
+        <p:nvPicPr>
+          <p:cNvPr id="4" name="Picture 3">
+            <a:extLst>
+              <a:ext uri="{FF2B5EF4-FFF2-40B4-BE49-F238E27FC236}">
+                <a16:creationId xmlns:a16="http://schemas.microsoft.com/office/drawing/2014/main" id="{C30DAA33-461B-1580-0CAF-EDE1E4E82302}"/>
+              </a:ext>
+            </a:extLst>
+          </p:cNvPr>
+          <p:cNvPicPr>
+            <a:picLocks noChangeAspect="1"/>
+          </p:cNvPicPr>
+          <p:nvPr/>
+        </p:nvPicPr>
+        <p:blipFill>
+          <a:blip r:embed="rId2"/>
+          <a:stretch>
+            <a:fillRect/>
+          </a:stretch>
+        </p:blipFill>
+        <p:spPr>
+          <a:xfrm>
+            <a:off x="0" y="1778000"/>
+            <a:ext cx="12192000" cy="5080000"/>
+          </a:xfrm>
+          <a:prstGeom prst="rect">
+            <a:avLst/>
+          </a:prstGeom>
+        </p:spPr>
+      </p:pic>
     </p:spTree>
     <p:extLst>
       <p:ext uri="{BB962C8B-B14F-4D97-AF65-F5344CB8AC3E}">
